--- a/02-classes-constructors-destructors/slides-1-classes.pptx
+++ b/02-classes-constructors-destructors/slides-1-classes.pptx
@@ -119,6 +119,11 @@
       </a:defRPr>
     </a:lvl9pPr>
   </p:defaultTextStyle>
+  <p:extLst>
+    <p:ext uri="{EFAFB233-063F-42B5-8137-9DF3F51BA10A}">
+      <p15:sldGuideLst xmlns:p15="http://schemas.microsoft.com/office/powerpoint/2012/main"/>
+    </p:ext>
+  </p:extLst>
 </p:presentation>
 </file>
 
@@ -1505,8 +1510,8 @@
         </p:nvSpPr>
         <p:spPr>
           <a:xfrm>
-            <a:off x="990720" y="768240"/>
-            <a:ext cx="5117760" cy="3838320"/>
+            <a:off x="990600" y="768350"/>
+            <a:ext cx="5118100" cy="3838575"/>
           </a:xfrm>
           <a:prstGeom prst="rect">
             <a:avLst/>
@@ -1681,8 +1686,8 @@
         </p:nvSpPr>
         <p:spPr>
           <a:xfrm>
-            <a:off x="990720" y="768240"/>
-            <a:ext cx="5117760" cy="3838320"/>
+            <a:off x="990600" y="768350"/>
+            <a:ext cx="5118100" cy="3838575"/>
           </a:xfrm>
           <a:prstGeom prst="rect">
             <a:avLst/>
@@ -1857,8 +1862,8 @@
         </p:nvSpPr>
         <p:spPr>
           <a:xfrm>
-            <a:off x="990720" y="768240"/>
-            <a:ext cx="5117760" cy="3838320"/>
+            <a:off x="990600" y="768350"/>
+            <a:ext cx="5118100" cy="3838575"/>
           </a:xfrm>
           <a:prstGeom prst="rect">
             <a:avLst/>
@@ -2684,7 +2689,7 @@
                 <a:uFillTx/>
                 <a:latin typeface="Arial"/>
               </a:rPr>
-              <a:t>2026-03-21</a:t>
+              <a:t>2026-03-23</a:t>
             </a:fld>
             <a:endParaRPr lang="en-US" sz="2400" b="0" u="none" strike="noStrike">
               <a:solidFill>
@@ -3617,7 +3622,7 @@
                 <a:uFillTx/>
                 <a:latin typeface="Arial"/>
               </a:rPr>
-              <a:t>2026-03-21</a:t>
+              <a:t>2026-03-23</a:t>
             </a:fld>
             <a:endParaRPr lang="en-US" sz="2400" b="0" u="none" strike="noStrike">
               <a:solidFill>
@@ -5094,7 +5099,7 @@
                 <a:uFillTx/>
                 <a:latin typeface="Arial"/>
               </a:rPr>
-              <a:t>2026-03-21</a:t>
+              <a:t>2026-03-23</a:t>
             </a:fld>
             <a:endParaRPr lang="en-US" sz="2400" b="0" u="none" strike="noStrike">
               <a:solidFill>
@@ -7286,7 +7291,7 @@
                 <a:uFillTx/>
                 <a:latin typeface="Arial"/>
               </a:rPr>
-              <a:t>2026-03-21</a:t>
+              <a:t>2026-03-23</a:t>
             </a:fld>
             <a:endParaRPr lang="en-US" sz="2400" b="0" u="none" strike="noStrike">
               <a:solidFill>
@@ -15931,7 +15936,7 @@
         </p:nvGraphicFramePr>
         <p:xfrm>
           <a:off x="274320" y="136440"/>
-          <a:ext cx="8722800" cy="733680"/>
+          <a:ext cx="8723160" cy="734040"/>
         </p:xfrm>
         <a:graphic>
           <a:graphicData uri="http://schemas.openxmlformats.org/drawingml/2006/table">
@@ -17162,7 +17167,7 @@
         </p:nvGraphicFramePr>
         <p:xfrm>
           <a:off x="274320" y="136440"/>
-          <a:ext cx="8722800" cy="733680"/>
+          <a:ext cx="8723160" cy="734040"/>
         </p:xfrm>
         <a:graphic>
           <a:graphicData uri="http://schemas.openxmlformats.org/drawingml/2006/table">
@@ -17788,7 +17793,7 @@
         </p:nvGraphicFramePr>
         <p:xfrm>
           <a:off x="392040" y="357480"/>
-          <a:ext cx="8563680" cy="5768640"/>
+          <a:ext cx="8564040" cy="5769000"/>
         </p:xfrm>
         <a:graphic>
           <a:graphicData uri="http://schemas.openxmlformats.org/drawingml/2006/table">
@@ -18382,7 +18387,7 @@
         </p:nvGraphicFramePr>
         <p:xfrm>
           <a:off x="4029120" y="1280520"/>
-          <a:ext cx="1386000" cy="2263320"/>
+          <a:ext cx="1386360" cy="2377440"/>
         </p:xfrm>
         <a:graphic>
           <a:graphicData uri="http://schemas.openxmlformats.org/drawingml/2006/table">
@@ -18745,7 +18750,7 @@
         </p:nvGraphicFramePr>
         <p:xfrm>
           <a:off x="7098480" y="1696320"/>
-          <a:ext cx="367200" cy="1132200"/>
+          <a:ext cx="367560" cy="1188720"/>
         </p:xfrm>
         <a:graphic>
           <a:graphicData uri="http://schemas.openxmlformats.org/drawingml/2006/table">
@@ -18937,7 +18942,7 @@
         </p:nvGraphicFramePr>
         <p:xfrm>
           <a:off x="7530120" y="5282280"/>
-          <a:ext cx="730440" cy="754920"/>
+          <a:ext cx="730800" cy="792480"/>
         </p:xfrm>
         <a:graphic>
           <a:graphicData uri="http://schemas.openxmlformats.org/drawingml/2006/table">
@@ -19074,7 +19079,7 @@
         </p:nvGraphicFramePr>
         <p:xfrm>
           <a:off x="6081840" y="4320000"/>
-          <a:ext cx="742320" cy="754920"/>
+          <a:ext cx="742680" cy="792480"/>
         </p:xfrm>
         <a:graphic>
           <a:graphicData uri="http://schemas.openxmlformats.org/drawingml/2006/table">
@@ -19211,7 +19216,7 @@
         </p:nvGraphicFramePr>
         <p:xfrm>
           <a:off x="6959160" y="3690720"/>
-          <a:ext cx="716400" cy="754920"/>
+          <a:ext cx="716760" cy="792480"/>
         </p:xfrm>
         <a:graphic>
           <a:graphicData uri="http://schemas.openxmlformats.org/drawingml/2006/table">
